--- a/slides/Toan10/Slide_TOAN10_Bai6_T18-21.pptx
+++ b/slides/Toan10/Slide_TOAN10_Bai6_T18-21.pptx
@@ -3885,7 +3885,7 @@
                 </a:r>
                 <a:r>
                   <a:rPr lang="vi-VN"/>
-                  <a:t>S=\sqrt{p(p-a)(p-b)(p-c)}</a:t>
+                  <a:t>S=\sqrt{p(p−a)(p−b)(p−c)}</a:t>
                 </a:r>
               </a:p>
             </p:txBody>
@@ -8663,7 +8663,7 @@
                 </a:r>
                 <a:r>
                   <a:rPr lang="vi-VN"/>
-                  <a:t>\cos\ A=\frac{b^2+c^2-a^2}{2bc}</a:t>
+                  <a:t>\cos\ A=\frac{b^2+c^2−a^2}{2bc}</a:t>
                 </a:r>
               </a:p>
             </p:txBody>
